--- a/docs/presentations/Dokaz_Investor_Deck.pptx
+++ b/docs/presentations/Dokaz_Investor_Deck.pptx
@@ -4017,7 +4017,7 @@
                 </a:solidFill>
                 <a:latin typeface="Calibri"/>
               </a:rPr>
-              <a:t>· Goal: 10 paid pilots at $299 (Growth)</a:t>
+              <a:t>· Goal: 10 paid pilots at $300 (Growth)</a:t>
             </a:r>
           </a:p>
         </p:txBody>
@@ -7783,7 +7783,7 @@
                 </a:solidFill>
                 <a:latin typeface="Calibri"/>
               </a:rPr>
-              <a:t>Point Dokaz at a pg_dump. We fetch, restore in an isolated sandbox, assert row counts / table exists / no nulls, and sign the result. Weekly on Starter and Growth, daily on Scale.</a:t>
+              <a:t>Point Dokaz at a pg_dump. We fetch, restore in an isolated sandbox, assert row counts / table exists / no nulls, and sign the result. Daily drills baseline on every paid tier.</a:t>
             </a:r>
           </a:p>
         </p:txBody>
@@ -13378,7 +13378,7 @@
                 </a:solidFill>
                 <a:latin typeface="Calibri"/>
               </a:rPr>
-              <a:t>$99</a:t>
+              <a:t>$100</a:t>
             </a:r>
           </a:p>
         </p:txBody>
@@ -13496,7 +13496,7 @@
                 </a:solidFill>
                 <a:latin typeface="Calibri"/>
               </a:rPr>
-              <a:t>DRILL FREQUENCY</a:t>
+              <a:t>CAPACITY</a:t>
             </a:r>
           </a:p>
         </p:txBody>
@@ -13531,7 +13531,7 @@
                 </a:solidFill>
                 <a:latin typeface="Calibri"/>
               </a:rPr>
-              <a:t>Weekly</a:t>
+              <a:t>5 databases</a:t>
             </a:r>
           </a:p>
         </p:txBody>
@@ -13566,7 +13566,7 @@
                 </a:solidFill>
                 <a:latin typeface="Calibri"/>
               </a:rPr>
-              <a:t>· 5 databases</a:t>
+              <a:t>· Daily drills · signed PDF · 7-year retention</a:t>
             </a:r>
           </a:p>
         </p:txBody>
@@ -13601,7 +13601,7 @@
                 </a:solidFill>
                 <a:latin typeface="Calibri"/>
               </a:rPr>
-              <a:t>· 3 seats</a:t>
+              <a:t>· Unlimited seats</a:t>
             </a:r>
           </a:p>
         </p:txBody>
@@ -13636,7 +13636,7 @@
                 </a:solidFill>
                 <a:latin typeface="Calibri"/>
               </a:rPr>
-              <a:t>· Signed PDF · 7-year retention</a:t>
+              <a:t>· 25 backup check-ins</a:t>
             </a:r>
           </a:p>
         </p:txBody>
@@ -13913,7 +13913,7 @@
                 </a:solidFill>
                 <a:latin typeface="Calibri"/>
               </a:rPr>
-              <a:t>$299</a:t>
+              <a:t>$300</a:t>
             </a:r>
           </a:p>
         </p:txBody>
@@ -14031,7 +14031,7 @@
                 </a:solidFill>
                 <a:latin typeface="Calibri"/>
               </a:rPr>
-              <a:t>DRILL FREQUENCY</a:t>
+              <a:t>CAPACITY</a:t>
             </a:r>
           </a:p>
         </p:txBody>
@@ -14066,7 +14066,7 @@
                 </a:solidFill>
                 <a:latin typeface="Calibri"/>
               </a:rPr>
-              <a:t>Weekly</a:t>
+              <a:t>25 databases</a:t>
             </a:r>
           </a:p>
         </p:txBody>
@@ -14101,7 +14101,7 @@
                 </a:solidFill>
                 <a:latin typeface="Calibri"/>
               </a:rPr>
-              <a:t>· 25 databases</a:t>
+              <a:t>· Daily drills · everything in Starter</a:t>
             </a:r>
           </a:p>
         </p:txBody>
@@ -14136,7 +14136,7 @@
                 </a:solidFill>
                 <a:latin typeface="Calibri"/>
               </a:rPr>
-              <a:t>· 10 seats</a:t>
+              <a:t>· 50 backup check-ins</a:t>
             </a:r>
           </a:p>
         </p:txBody>
@@ -14171,7 +14171,7 @@
                 </a:solidFill>
                 <a:latin typeface="Calibri"/>
               </a:rPr>
-              <a:t>· Everything in Starter</a:t>
+              <a:t>· Unlimited API keys · signed webhooks</a:t>
             </a:r>
           </a:p>
         </p:txBody>
@@ -14206,41 +14206,6 @@
                 </a:solidFill>
                 <a:latin typeface="Calibri"/>
               </a:rPr>
-              <a:t>· API access · signed webhooks</a:t>
-            </a:r>
-          </a:p>
-        </p:txBody>
-      </p:sp>
-      <p:sp>
-        <p:nvSpPr>
-          <p:cNvPr id="33" name="TextBox 32"/>
-          <p:cNvSpPr txBox="1"/>
-          <p:nvPr/>
-        </p:nvSpPr>
-        <p:spPr>
-          <a:xfrm>
-            <a:off x="3703320" y="5513832"/>
-            <a:ext cx="2194560" cy="274320"/>
-          </a:xfrm>
-          <a:prstGeom prst="rect">
-            <a:avLst/>
-          </a:prstGeom>
-          <a:noFill/>
-        </p:spPr>
-        <p:txBody>
-          <a:bodyPr wrap="square" lIns="0" rIns="0" tIns="0" bIns="0" anchor="t">
-            <a:spAutoFit/>
-          </a:bodyPr>
-          <a:lstStyle/>
-          <a:p>
-            <a:pPr algn="l"/>
-            <a:r>
-              <a:rPr sz="950" b="0">
-                <a:solidFill>
-                  <a:srgbClr val="D7DEE7"/>
-                </a:solidFill>
-                <a:latin typeface="Calibri"/>
-              </a:rPr>
               <a:t>· Priority support</a:t>
             </a:r>
           </a:p>
@@ -14248,7 +14213,7 @@
       </p:sp>
       <p:sp>
         <p:nvSpPr>
-          <p:cNvPr id="34" name="Rounded Rectangle 33"/>
+          <p:cNvPr id="33" name="Rounded Rectangle 32"/>
           <p:cNvSpPr/>
           <p:nvPr/>
         </p:nvSpPr>
@@ -14296,7 +14261,7 @@
       </p:sp>
       <p:sp>
         <p:nvSpPr>
-          <p:cNvPr id="35" name="TextBox 34"/>
+          <p:cNvPr id="34" name="TextBox 33"/>
           <p:cNvSpPr txBox="1"/>
           <p:nvPr/>
         </p:nvSpPr>
@@ -14324,14 +14289,14 @@
                 </a:solidFill>
                 <a:latin typeface="Calibri"/>
               </a:rPr>
-              <a:t>Scale</a:t>
-            </a:r>
-          </a:p>
-        </p:txBody>
-      </p:sp>
-      <p:sp>
-        <p:nvSpPr>
-          <p:cNvPr id="36" name="TextBox 35"/>
+              <a:t>Grounded</a:t>
+            </a:r>
+          </a:p>
+        </p:txBody>
+      </p:sp>
+      <p:sp>
+        <p:nvSpPr>
+          <p:cNvPr id="35" name="TextBox 34"/>
           <p:cNvSpPr txBox="1"/>
           <p:nvPr/>
         </p:nvSpPr>
@@ -14359,14 +14324,14 @@
                 </a:solidFill>
                 <a:latin typeface="Calibri"/>
               </a:rPr>
-              <a:t>$799</a:t>
-            </a:r>
-          </a:p>
-        </p:txBody>
-      </p:sp>
-      <p:sp>
-        <p:nvSpPr>
-          <p:cNvPr id="37" name="TextBox 36"/>
+              <a:t>$600</a:t>
+            </a:r>
+          </a:p>
+        </p:txBody>
+      </p:sp>
+      <p:sp>
+        <p:nvSpPr>
+          <p:cNvPr id="36" name="TextBox 35"/>
           <p:cNvSpPr txBox="1"/>
           <p:nvPr/>
         </p:nvSpPr>
@@ -14401,7 +14366,7 @@
       </p:sp>
       <p:sp>
         <p:nvSpPr>
-          <p:cNvPr id="38" name="Rounded Rectangle 37"/>
+          <p:cNvPr id="37" name="Rounded Rectangle 36"/>
           <p:cNvSpPr/>
           <p:nvPr/>
         </p:nvSpPr>
@@ -14449,7 +14414,7 @@
       </p:sp>
       <p:sp>
         <p:nvSpPr>
-          <p:cNvPr id="39" name="TextBox 38"/>
+          <p:cNvPr id="38" name="TextBox 37"/>
           <p:cNvSpPr txBox="1"/>
           <p:nvPr/>
         </p:nvSpPr>
@@ -14477,14 +14442,14 @@
                 </a:solidFill>
                 <a:latin typeface="Calibri"/>
               </a:rPr>
-              <a:t>DRILL FREQUENCY</a:t>
-            </a:r>
-          </a:p>
-        </p:txBody>
-      </p:sp>
-      <p:sp>
-        <p:nvSpPr>
-          <p:cNvPr id="40" name="TextBox 39"/>
+              <a:t>CAPACITY</a:t>
+            </a:r>
+          </a:p>
+        </p:txBody>
+      </p:sp>
+      <p:sp>
+        <p:nvSpPr>
+          <p:cNvPr id="39" name="TextBox 38"/>
           <p:cNvSpPr txBox="1"/>
           <p:nvPr/>
         </p:nvSpPr>
@@ -14512,14 +14477,14 @@
                 </a:solidFill>
                 <a:latin typeface="Calibri"/>
               </a:rPr>
-              <a:t>Daily</a:t>
-            </a:r>
-          </a:p>
-        </p:txBody>
-      </p:sp>
-      <p:sp>
-        <p:nvSpPr>
-          <p:cNvPr id="41" name="TextBox 40"/>
+              <a:t>100 databases</a:t>
+            </a:r>
+          </a:p>
+        </p:txBody>
+      </p:sp>
+      <p:sp>
+        <p:nvSpPr>
+          <p:cNvPr id="40" name="TextBox 39"/>
           <p:cNvSpPr txBox="1"/>
           <p:nvPr/>
         </p:nvSpPr>
@@ -14547,14 +14512,14 @@
                 </a:solidFill>
                 <a:latin typeface="Calibri"/>
               </a:rPr>
-              <a:t>· Unlimited databases</a:t>
-            </a:r>
-          </a:p>
-        </p:txBody>
-      </p:sp>
-      <p:sp>
-        <p:nvSpPr>
-          <p:cNvPr id="42" name="TextBox 41"/>
+              <a:t>· Daily drills · everything in Growth</a:t>
+            </a:r>
+          </a:p>
+        </p:txBody>
+      </p:sp>
+      <p:sp>
+        <p:nvSpPr>
+          <p:cNvPr id="41" name="TextBox 40"/>
           <p:cNvSpPr txBox="1"/>
           <p:nvPr/>
         </p:nvSpPr>
@@ -14582,14 +14547,14 @@
                 </a:solidFill>
                 <a:latin typeface="Calibri"/>
               </a:rPr>
-              <a:t>· Unlimited seats</a:t>
-            </a:r>
-          </a:p>
-        </p:txBody>
-      </p:sp>
-      <p:sp>
-        <p:nvSpPr>
-          <p:cNvPr id="43" name="TextBox 42"/>
+              <a:t>· Unlimited backup check-ins</a:t>
+            </a:r>
+          </a:p>
+        </p:txBody>
+      </p:sp>
+      <p:sp>
+        <p:nvSpPr>
+          <p:cNvPr id="42" name="TextBox 41"/>
           <p:cNvSpPr txBox="1"/>
           <p:nvPr/>
         </p:nvSpPr>
@@ -14617,14 +14582,14 @@
                 </a:solidFill>
                 <a:latin typeface="Calibri"/>
               </a:rPr>
-              <a:t>· Everything in Growth</a:t>
-            </a:r>
-          </a:p>
-        </p:txBody>
-      </p:sp>
-      <p:sp>
-        <p:nvSpPr>
-          <p:cNvPr id="44" name="TextBox 43"/>
+              <a:t>· Priority + dedicated channel</a:t>
+            </a:r>
+          </a:p>
+        </p:txBody>
+      </p:sp>
+      <p:sp>
+        <p:nvSpPr>
+          <p:cNvPr id="43" name="TextBox 42"/>
           <p:cNvSpPr txBox="1"/>
           <p:nvPr/>
         </p:nvSpPr>
@@ -14652,41 +14617,6 @@
                 </a:solidFill>
                 <a:latin typeface="Calibri"/>
               </a:rPr>
-              <a:t>· Priority + dedicated channel</a:t>
-            </a:r>
-          </a:p>
-        </p:txBody>
-      </p:sp>
-      <p:sp>
-        <p:nvSpPr>
-          <p:cNvPr id="45" name="TextBox 44"/>
-          <p:cNvSpPr txBox="1"/>
-          <p:nvPr/>
-        </p:nvSpPr>
-        <p:spPr>
-          <a:xfrm>
-            <a:off x="6583680" y="5513832"/>
-            <a:ext cx="2194560" cy="274320"/>
-          </a:xfrm>
-          <a:prstGeom prst="rect">
-            <a:avLst/>
-          </a:prstGeom>
-          <a:noFill/>
-        </p:spPr>
-        <p:txBody>
-          <a:bodyPr wrap="square" lIns="0" rIns="0" tIns="0" bIns="0" anchor="t">
-            <a:spAutoFit/>
-          </a:bodyPr>
-          <a:lstStyle/>
-          <a:p>
-            <a:pPr algn="l"/>
-            <a:r>
-              <a:rPr sz="950" b="0">
-                <a:solidFill>
-                  <a:srgbClr val="D7DEE7"/>
-                </a:solidFill>
-                <a:latin typeface="Calibri"/>
-              </a:rPr>
               <a:t>· SSO (roadmap)</a:t>
             </a:r>
           </a:p>
@@ -14694,7 +14624,7 @@
       </p:sp>
       <p:sp>
         <p:nvSpPr>
-          <p:cNvPr id="46" name="Rounded Rectangle 45"/>
+          <p:cNvPr id="44" name="Rounded Rectangle 43"/>
           <p:cNvSpPr/>
           <p:nvPr/>
         </p:nvSpPr>
@@ -14742,7 +14672,7 @@
       </p:sp>
       <p:sp>
         <p:nvSpPr>
-          <p:cNvPr id="47" name="TextBox 46"/>
+          <p:cNvPr id="45" name="TextBox 44"/>
           <p:cNvSpPr txBox="1"/>
           <p:nvPr/>
         </p:nvSpPr>
@@ -14777,7 +14707,7 @@
       </p:sp>
       <p:sp>
         <p:nvSpPr>
-          <p:cNvPr id="48" name="TextBox 47"/>
+          <p:cNvPr id="46" name="TextBox 45"/>
           <p:cNvSpPr txBox="1"/>
           <p:nvPr/>
         </p:nvSpPr>
@@ -14805,14 +14735,14 @@
                 </a:solidFill>
                 <a:latin typeface="Calibri"/>
               </a:rPr>
-              <a:t>From $1.5k</a:t>
-            </a:r>
-          </a:p>
-        </p:txBody>
-      </p:sp>
-      <p:sp>
-        <p:nvSpPr>
-          <p:cNvPr id="49" name="TextBox 48"/>
+              <a:t>Custom</a:t>
+            </a:r>
+          </a:p>
+        </p:txBody>
+      </p:sp>
+      <p:sp>
+        <p:nvSpPr>
+          <p:cNvPr id="47" name="TextBox 46"/>
           <p:cNvSpPr txBox="1"/>
           <p:nvPr/>
         </p:nvSpPr>
@@ -14840,14 +14770,14 @@
                 </a:solidFill>
                 <a:latin typeface="Calibri"/>
               </a:rPr>
-              <a:t>/mo</a:t>
-            </a:r>
-          </a:p>
-        </p:txBody>
-      </p:sp>
-      <p:sp>
-        <p:nvSpPr>
-          <p:cNvPr id="50" name="Rounded Rectangle 49"/>
+              <a:t/>
+            </a:r>
+          </a:p>
+        </p:txBody>
+      </p:sp>
+      <p:sp>
+        <p:nvSpPr>
+          <p:cNvPr id="48" name="Rounded Rectangle 47"/>
           <p:cNvSpPr/>
           <p:nvPr/>
         </p:nvSpPr>
@@ -14895,7 +14825,7 @@
       </p:sp>
       <p:sp>
         <p:nvSpPr>
-          <p:cNvPr id="51" name="TextBox 50"/>
+          <p:cNvPr id="49" name="TextBox 48"/>
           <p:cNvSpPr txBox="1"/>
           <p:nvPr/>
         </p:nvSpPr>
@@ -14923,14 +14853,14 @@
                 </a:solidFill>
                 <a:latin typeface="Calibri"/>
               </a:rPr>
-              <a:t>DRILL FREQUENCY</a:t>
-            </a:r>
-          </a:p>
-        </p:txBody>
-      </p:sp>
-      <p:sp>
-        <p:nvSpPr>
-          <p:cNvPr id="52" name="TextBox 51"/>
+              <a:t>REGULATED / HANDS-ON</a:t>
+            </a:r>
+          </a:p>
+        </p:txBody>
+      </p:sp>
+      <p:sp>
+        <p:nvSpPr>
+          <p:cNvPr id="50" name="TextBox 49"/>
           <p:cNvSpPr txBox="1"/>
           <p:nvPr/>
         </p:nvSpPr>
@@ -14958,14 +14888,14 @@
                 </a:solidFill>
                 <a:latin typeface="Calibri"/>
               </a:rPr>
-              <a:t>Custom</a:t>
-            </a:r>
-          </a:p>
-        </p:txBody>
-      </p:sp>
-      <p:sp>
-        <p:nvSpPr>
-          <p:cNvPr id="53" name="TextBox 52"/>
+              <a:t>Sales-led</a:t>
+            </a:r>
+          </a:p>
+        </p:txBody>
+      </p:sp>
+      <p:sp>
+        <p:nvSpPr>
+          <p:cNvPr id="51" name="TextBox 50"/>
           <p:cNvSpPr txBox="1"/>
           <p:nvPr/>
         </p:nvSpPr>
@@ -14993,14 +14923,14 @@
                 </a:solidFill>
                 <a:latin typeface="Calibri"/>
               </a:rPr>
-              <a:t>· Hourly + custom cadence</a:t>
-            </a:r>
-          </a:p>
-        </p:txBody>
-      </p:sp>
-      <p:sp>
-        <p:nvSpPr>
-          <p:cNvPr id="54" name="TextBox 53"/>
+              <a:t>· BYO runner in your VPC · SSO/SAML</a:t>
+            </a:r>
+          </a:p>
+        </p:txBody>
+      </p:sp>
+      <p:sp>
+        <p:nvSpPr>
+          <p:cNvPr id="52" name="TextBox 51"/>
           <p:cNvSpPr txBox="1"/>
           <p:nvPr/>
         </p:nvSpPr>
@@ -15028,14 +14958,14 @@
                 </a:solidFill>
                 <a:latin typeface="Calibri"/>
               </a:rPr>
-              <a:t>· Auditor read-only accounts</a:t>
-            </a:r>
-          </a:p>
-        </p:txBody>
-      </p:sp>
-      <p:sp>
-        <p:nvSpPr>
-          <p:cNvPr id="55" name="TextBox 54"/>
+              <a:t>· BAA / DPA · hourly cadence</a:t>
+            </a:r>
+          </a:p>
+        </p:txBody>
+      </p:sp>
+      <p:sp>
+        <p:nvSpPr>
+          <p:cNvPr id="53" name="TextBox 52"/>
           <p:cNvSpPr txBox="1"/>
           <p:nvPr/>
         </p:nvSpPr>
@@ -15063,14 +14993,14 @@
                 </a:solidFill>
                 <a:latin typeface="Calibri"/>
               </a:rPr>
-              <a:t>· BYO runner in your VPC</a:t>
-            </a:r>
-          </a:p>
-        </p:txBody>
-      </p:sp>
-      <p:sp>
-        <p:nvSpPr>
-          <p:cNvPr id="56" name="TextBox 55"/>
+              <a:t>· Auditor read-only accounts</a:t>
+            </a:r>
+          </a:p>
+        </p:txBody>
+      </p:sp>
+      <p:sp>
+        <p:nvSpPr>
+          <p:cNvPr id="54" name="TextBox 53"/>
           <p:cNvSpPr txBox="1"/>
           <p:nvPr/>
         </p:nvSpPr>
@@ -15098,49 +15028,14 @@
                 </a:solidFill>
                 <a:latin typeface="Calibri"/>
               </a:rPr>
-              <a:t>· Longer retention · custom SLA</a:t>
-            </a:r>
-          </a:p>
-        </p:txBody>
-      </p:sp>
-      <p:sp>
-        <p:nvSpPr>
-          <p:cNvPr id="57" name="TextBox 56"/>
-          <p:cNvSpPr txBox="1"/>
-          <p:nvPr/>
-        </p:nvSpPr>
-        <p:spPr>
-          <a:xfrm>
-            <a:off x="9464040" y="5513832"/>
-            <a:ext cx="2194560" cy="274320"/>
-          </a:xfrm>
-          <a:prstGeom prst="rect">
-            <a:avLst/>
-          </a:prstGeom>
-          <a:noFill/>
-        </p:spPr>
-        <p:txBody>
-          <a:bodyPr wrap="square" lIns="0" rIns="0" tIns="0" bIns="0" anchor="t">
-            <a:spAutoFit/>
-          </a:bodyPr>
-          <a:lstStyle/>
-          <a:p>
-            <a:pPr algn="l"/>
-            <a:r>
-              <a:rPr sz="950" b="0">
-                <a:solidFill>
-                  <a:srgbClr val="D7DEE7"/>
-                </a:solidFill>
-                <a:latin typeface="Calibri"/>
-              </a:rPr>
-              <a:t>· Named account manager</a:t>
-            </a:r>
-          </a:p>
-        </p:txBody>
-      </p:sp>
-      <p:sp>
-        <p:nvSpPr>
-          <p:cNvPr id="58" name="TextBox 57"/>
+              <a:t>· Custom SLA · named account manager</a:t>
+            </a:r>
+          </a:p>
+        </p:txBody>
+      </p:sp>
+      <p:sp>
+        <p:nvSpPr>
+          <p:cNvPr id="55" name="TextBox 54"/>
           <p:cNvSpPr txBox="1"/>
           <p:nvPr/>
         </p:nvSpPr>
@@ -15168,7 +15063,7 @@
                 </a:solidFill>
                 <a:latin typeface="Calibri"/>
               </a:rPr>
-              <a:t>Trial: $1 first month, one real database at weekly cadence — the buyer proves the product on their own dump before the paywall re-arms.</a:t>
+              <a:t>Every tier: daily drills, signed PDF evidence, 7-year retention, unlimited seats. Trial: $1 first month, one real database.</a:t>
             </a:r>
           </a:p>
         </p:txBody>

--- a/docs/presentations/Dokaz_Investor_Deck.pptx
+++ b/docs/presentations/Dokaz_Investor_Deck.pptx
@@ -7439,7 +7439,7 @@
                 </a:solidFill>
                 <a:latin typeface="Calibri"/>
               </a:rPr>
-              <a:t>Email + password. $1 first month; card required, cancel anytime. The trial gives one real database at weekly cadence, so the buyer proves the product on their own dump.</a:t>
+              <a:t>Email + password. Free to start, no card required. A trial account can run drills against the built-in sample and connect one real database at weekly cadence to prove the product on their own dump.</a:t>
             </a:r>
           </a:p>
         </p:txBody>
@@ -15063,7 +15063,7 @@
                 </a:solidFill>
                 <a:latin typeface="Calibri"/>
               </a:rPr>
-              <a:t>Every tier: daily drills, signed PDF evidence, 7-year retention, unlimited seats. Trial: $1 first month, one real database.</a:t>
+              <a:t>Every tier: daily drills, signed PDF evidence, 7-year retention, unlimited seats. Free trial: one real database at weekly cadence.</a:t>
             </a:r>
           </a:p>
         </p:txBody>
